--- a/clase-03/apuntes_clase3.pptx
+++ b/clase-03/apuntes_clase3.pptx
@@ -277,7 +277,7 @@
           <a:p>
             <a:fld id="{163E4E5A-E75E-4899-90F5-DDB39F3E781F}" type="datetimeFigureOut">
               <a:rPr lang="es-CO" smtClean="0"/>
-              <a:t>10/08/2026</a:t>
+              <a:t>13/08/2026</a:t>
             </a:fld>
             <a:endParaRPr lang="es-CO"/>
           </a:p>
@@ -477,7 +477,7 @@
           <a:p>
             <a:fld id="{163E4E5A-E75E-4899-90F5-DDB39F3E781F}" type="datetimeFigureOut">
               <a:rPr lang="es-CO" smtClean="0"/>
-              <a:t>10/08/2026</a:t>
+              <a:t>13/08/2026</a:t>
             </a:fld>
             <a:endParaRPr lang="es-CO"/>
           </a:p>
@@ -687,7 +687,7 @@
           <a:p>
             <a:fld id="{163E4E5A-E75E-4899-90F5-DDB39F3E781F}" type="datetimeFigureOut">
               <a:rPr lang="es-CO" smtClean="0"/>
-              <a:t>10/08/2026</a:t>
+              <a:t>13/08/2026</a:t>
             </a:fld>
             <a:endParaRPr lang="es-CO"/>
           </a:p>
@@ -887,7 +887,7 @@
           <a:p>
             <a:fld id="{163E4E5A-E75E-4899-90F5-DDB39F3E781F}" type="datetimeFigureOut">
               <a:rPr lang="es-CO" smtClean="0"/>
-              <a:t>10/08/2026</a:t>
+              <a:t>13/08/2026</a:t>
             </a:fld>
             <a:endParaRPr lang="es-CO"/>
           </a:p>
@@ -1163,7 +1163,7 @@
           <a:p>
             <a:fld id="{163E4E5A-E75E-4899-90F5-DDB39F3E781F}" type="datetimeFigureOut">
               <a:rPr lang="es-CO" smtClean="0"/>
-              <a:t>10/08/2026</a:t>
+              <a:t>13/08/2026</a:t>
             </a:fld>
             <a:endParaRPr lang="es-CO"/>
           </a:p>
@@ -1431,7 +1431,7 @@
           <a:p>
             <a:fld id="{163E4E5A-E75E-4899-90F5-DDB39F3E781F}" type="datetimeFigureOut">
               <a:rPr lang="es-CO" smtClean="0"/>
-              <a:t>10/08/2026</a:t>
+              <a:t>13/08/2026</a:t>
             </a:fld>
             <a:endParaRPr lang="es-CO"/>
           </a:p>
@@ -1846,7 +1846,7 @@
           <a:p>
             <a:fld id="{163E4E5A-E75E-4899-90F5-DDB39F3E781F}" type="datetimeFigureOut">
               <a:rPr lang="es-CO" smtClean="0"/>
-              <a:t>10/08/2026</a:t>
+              <a:t>13/08/2026</a:t>
             </a:fld>
             <a:endParaRPr lang="es-CO"/>
           </a:p>
@@ -1988,7 +1988,7 @@
           <a:p>
             <a:fld id="{163E4E5A-E75E-4899-90F5-DDB39F3E781F}" type="datetimeFigureOut">
               <a:rPr lang="es-CO" smtClean="0"/>
-              <a:t>10/08/2026</a:t>
+              <a:t>13/08/2026</a:t>
             </a:fld>
             <a:endParaRPr lang="es-CO"/>
           </a:p>
@@ -2101,7 +2101,7 @@
           <a:p>
             <a:fld id="{163E4E5A-E75E-4899-90F5-DDB39F3E781F}" type="datetimeFigureOut">
               <a:rPr lang="es-CO" smtClean="0"/>
-              <a:t>10/08/2026</a:t>
+              <a:t>13/08/2026</a:t>
             </a:fld>
             <a:endParaRPr lang="es-CO"/>
           </a:p>
@@ -2414,7 +2414,7 @@
           <a:p>
             <a:fld id="{163E4E5A-E75E-4899-90F5-DDB39F3E781F}" type="datetimeFigureOut">
               <a:rPr lang="es-CO" smtClean="0"/>
-              <a:t>10/08/2026</a:t>
+              <a:t>13/08/2026</a:t>
             </a:fld>
             <a:endParaRPr lang="es-CO"/>
           </a:p>
@@ -2703,7 +2703,7 @@
           <a:p>
             <a:fld id="{163E4E5A-E75E-4899-90F5-DDB39F3E781F}" type="datetimeFigureOut">
               <a:rPr lang="es-CO" smtClean="0"/>
-              <a:t>10/08/2026</a:t>
+              <a:t>13/08/2026</a:t>
             </a:fld>
             <a:endParaRPr lang="es-CO"/>
           </a:p>
@@ -2946,7 +2946,7 @@
           <a:p>
             <a:fld id="{163E4E5A-E75E-4899-90F5-DDB39F3E781F}" type="datetimeFigureOut">
               <a:rPr lang="es-CO" smtClean="0"/>
-              <a:t>10/08/2026</a:t>
+              <a:t>13/08/2026</a:t>
             </a:fld>
             <a:endParaRPr lang="es-CO"/>
           </a:p>
@@ -6937,8 +6937,8 @@
           </a:p>
         </p:txBody>
       </p:sp>
-      <mc:AlternateContent xmlns:mc="http://schemas.openxmlformats.org/markup-compatibility/2006">
-        <mc:Choice xmlns:a14="http://schemas.microsoft.com/office/drawing/2010/main" Requires="a14">
+      <mc:AlternateContent xmlns:mc="http://schemas.openxmlformats.org/markup-compatibility/2006" xmlns:a14="http://schemas.microsoft.com/office/drawing/2010/main">
+        <mc:Choice Requires="a14">
           <p:graphicFrame>
             <p:nvGraphicFramePr>
               <p:cNvPr id="4" name="Tabla 3">
@@ -7140,6 +7140,7 @@
                         <a:bodyPr/>
                         <a:lstStyle/>
                         <a:p>
+                          <a:pPr/>
                           <a14:m>
                             <m:oMathPara xmlns:m="http://schemas.openxmlformats.org/officeDocument/2006/math">
                               <m:oMathParaPr>
@@ -7204,6 +7205,7 @@
                         <a:bodyPr/>
                         <a:lstStyle/>
                         <a:p>
+                          <a:pPr/>
                           <a14:m>
                             <m:oMathPara xmlns:m="http://schemas.openxmlformats.org/officeDocument/2006/math">
                               <m:oMathParaPr>
@@ -7323,6 +7325,7 @@
                         <a:bodyPr/>
                         <a:lstStyle/>
                         <a:p>
+                          <a:pPr/>
                           <a14:m>
                             <m:oMathPara xmlns:m="http://schemas.openxmlformats.org/officeDocument/2006/math">
                               <m:oMathParaPr>
@@ -7413,6 +7416,7 @@
                         <a:bodyPr/>
                         <a:lstStyle/>
                         <a:p>
+                          <a:pPr/>
                           <a14:m>
                             <m:oMathPara xmlns:m="http://schemas.openxmlformats.org/officeDocument/2006/math">
                               <m:oMathParaPr>
@@ -7557,6 +7561,7 @@
                         <a:bodyPr/>
                         <a:lstStyle/>
                         <a:p>
+                          <a:pPr/>
                           <a14:m>
                             <m:oMathPara xmlns:m="http://schemas.openxmlformats.org/officeDocument/2006/math">
                               <m:oMathParaPr>
@@ -7647,6 +7652,7 @@
                         <a:bodyPr/>
                         <a:lstStyle/>
                         <a:p>
+                          <a:pPr/>
                           <a14:m>
                             <m:oMathPara xmlns:m="http://schemas.openxmlformats.org/officeDocument/2006/math">
                               <m:oMathParaPr>
@@ -7791,6 +7797,7 @@
                         <a:bodyPr/>
                         <a:lstStyle/>
                         <a:p>
+                          <a:pPr/>
                           <a14:m>
                             <m:oMathPara xmlns:m="http://schemas.openxmlformats.org/officeDocument/2006/math">
                               <m:oMathParaPr>
@@ -7881,6 +7888,7 @@
                         <a:bodyPr/>
                         <a:lstStyle/>
                         <a:p>
+                          <a:pPr/>
                           <a14:m>
                             <m:oMathPara xmlns:m="http://schemas.openxmlformats.org/officeDocument/2006/math">
                               <m:oMathParaPr>
@@ -8025,6 +8033,7 @@
                         <a:bodyPr/>
                         <a:lstStyle/>
                         <a:p>
+                          <a:pPr/>
                           <a14:m>
                             <m:oMathPara xmlns:m="http://schemas.openxmlformats.org/officeDocument/2006/math">
                               <m:oMathParaPr>
@@ -8115,6 +8124,7 @@
                         <a:bodyPr/>
                         <a:lstStyle/>
                         <a:p>
+                          <a:pPr/>
                           <a14:m>
                             <m:oMathPara xmlns:m="http://schemas.openxmlformats.org/officeDocument/2006/math">
                               <m:oMathParaPr>
@@ -8259,6 +8269,7 @@
                         <a:bodyPr/>
                         <a:lstStyle/>
                         <a:p>
+                          <a:pPr/>
                           <a14:m>
                             <m:oMathPara xmlns:m="http://schemas.openxmlformats.org/officeDocument/2006/math">
                               <m:oMathParaPr>
@@ -8349,6 +8360,7 @@
                         <a:bodyPr/>
                         <a:lstStyle/>
                         <a:p>
+                          <a:pPr/>
                           <a14:m>
                             <m:oMathPara xmlns:m="http://schemas.openxmlformats.org/officeDocument/2006/math">
                               <m:oMathParaPr>
@@ -8514,7 +8526,7 @@
             </a:graphic>
           </p:graphicFrame>
         </mc:Choice>
-        <mc:Fallback>
+        <mc:Fallback xmlns="">
           <p:graphicFrame>
             <p:nvGraphicFramePr>
               <p:cNvPr id="4" name="Tabla 3">
@@ -9470,8 +9482,8 @@
           </a:p>
         </p:txBody>
       </p:sp>
-      <mc:AlternateContent xmlns:mc="http://schemas.openxmlformats.org/markup-compatibility/2006">
-        <mc:Choice xmlns:a14="http://schemas.microsoft.com/office/drawing/2010/main" Requires="a14">
+      <mc:AlternateContent xmlns:mc="http://schemas.openxmlformats.org/markup-compatibility/2006" xmlns:a14="http://schemas.microsoft.com/office/drawing/2010/main">
+        <mc:Choice Requires="a14">
           <p:sp>
             <p:nvSpPr>
               <p:cNvPr id="3" name="Marcador de contenido 2">
@@ -10550,7 +10562,7 @@
             </p:txBody>
           </p:sp>
         </mc:Choice>
-        <mc:Fallback>
+        <mc:Fallback xmlns="">
           <p:sp>
             <p:nvSpPr>
               <p:cNvPr id="3" name="Marcador de contenido 2">
@@ -10657,8 +10669,8 @@
           </a:p>
         </p:txBody>
       </p:sp>
-      <mc:AlternateContent xmlns:mc="http://schemas.openxmlformats.org/markup-compatibility/2006">
-        <mc:Choice xmlns:a14="http://schemas.microsoft.com/office/drawing/2010/main" Requires="a14">
+      <mc:AlternateContent xmlns:mc="http://schemas.openxmlformats.org/markup-compatibility/2006" xmlns:a14="http://schemas.microsoft.com/office/drawing/2010/main">
+        <mc:Choice Requires="a14">
           <p:sp>
             <p:nvSpPr>
               <p:cNvPr id="3" name="Marcador de contenido 2">
@@ -10900,7 +10912,7 @@
             </p:txBody>
           </p:sp>
         </mc:Choice>
-        <mc:Fallback>
+        <mc:Fallback xmlns="">
           <p:sp>
             <p:nvSpPr>
               <p:cNvPr id="3" name="Marcador de contenido 2">
@@ -11007,8 +11019,8 @@
           </a:p>
         </p:txBody>
       </p:sp>
-      <mc:AlternateContent xmlns:mc="http://schemas.openxmlformats.org/markup-compatibility/2006">
-        <mc:Choice xmlns:a14="http://schemas.microsoft.com/office/drawing/2010/main" Requires="a14">
+      <mc:AlternateContent xmlns:mc="http://schemas.openxmlformats.org/markup-compatibility/2006" xmlns:a14="http://schemas.microsoft.com/office/drawing/2010/main">
+        <mc:Choice Requires="a14">
           <p:sp>
             <p:nvSpPr>
               <p:cNvPr id="3" name="Marcador de contenido 2">
@@ -11394,7 +11406,7 @@
             </p:txBody>
           </p:sp>
         </mc:Choice>
-        <mc:Fallback>
+        <mc:Fallback xmlns="">
           <p:sp>
             <p:nvSpPr>
               <p:cNvPr id="3" name="Marcador de contenido 2">
@@ -11501,8 +11513,8 @@
           </a:p>
         </p:txBody>
       </p:sp>
-      <mc:AlternateContent xmlns:mc="http://schemas.openxmlformats.org/markup-compatibility/2006">
-        <mc:Choice xmlns:a14="http://schemas.microsoft.com/office/drawing/2010/main" Requires="a14">
+      <mc:AlternateContent xmlns:mc="http://schemas.openxmlformats.org/markup-compatibility/2006" xmlns:a14="http://schemas.microsoft.com/office/drawing/2010/main">
+        <mc:Choice Requires="a14">
           <p:sp>
             <p:nvSpPr>
               <p:cNvPr id="3" name="Marcador de contenido 2">
@@ -12053,7 +12065,7 @@
             </p:txBody>
           </p:sp>
         </mc:Choice>
-        <mc:Fallback>
+        <mc:Fallback xmlns="">
           <p:sp>
             <p:nvSpPr>
               <p:cNvPr id="3" name="Marcador de contenido 2">
@@ -12248,63 +12260,73 @@
             <p:ph idx="1"/>
           </p:nvPr>
         </p:nvSpPr>
-        <p:spPr/>
+        <p:spPr>
+          <a:xfrm>
+            <a:off x="540327" y="1825625"/>
+            <a:ext cx="11028218" cy="4351338"/>
+          </a:xfrm>
+        </p:spPr>
         <p:txBody>
-          <a:bodyPr/>
+          <a:bodyPr>
+            <a:normAutofit/>
+          </a:bodyPr>
           <a:lstStyle/>
           <a:p>
             <a:r>
-              <a:rPr lang="es-CO" b="1" dirty="0"/>
+              <a:rPr lang="es-CO" sz="2400" b="1" dirty="0"/>
               <a:t>Pagina web</a:t>
             </a:r>
             <a:r>
-              <a:rPr lang="es-CO" dirty="0"/>
+              <a:rPr lang="es-CO" sz="2400" dirty="0"/>
               <a:t>: </a:t>
             </a:r>
             <a:r>
-              <a:rPr lang="es-CO" dirty="0">
+              <a:rPr lang="es-CO" sz="2400" dirty="0">
                 <a:hlinkClick r:id="rId2"/>
               </a:rPr>
               <a:t>https://discretas1-udea.github.io/discretas1-udea-20262/</a:t>
             </a:r>
-            <a:endParaRPr lang="es-CO" dirty="0"/>
+            <a:r>
+              <a:rPr lang="es-CO" sz="2400" dirty="0"/>
+              <a:t>  </a:t>
+            </a:r>
           </a:p>
           <a:p>
             <a:pPr lvl="1"/>
             <a:r>
-              <a:rPr lang="es-CO" b="1" dirty="0"/>
+              <a:rPr lang="es-CO" sz="2000" b="1" dirty="0"/>
               <a:t>Clase 2</a:t>
             </a:r>
             <a:r>
-              <a:rPr lang="es-CO" dirty="0"/>
+              <a:rPr lang="es-CO" sz="2000" dirty="0"/>
               <a:t>: </a:t>
             </a:r>
             <a:r>
-              <a:rPr lang="es-CO" dirty="0">
+              <a:rPr lang="es-CO" sz="2000" dirty="0">
                 <a:hlinkClick r:id="rId3"/>
               </a:rPr>
               <a:t>https://discretas1-udea.github.io/discretas1-udea-20262/lessons/mod1/clase1/</a:t>
             </a:r>
-            <a:endParaRPr lang="es-CO" dirty="0"/>
+            <a:endParaRPr lang="es-CO" sz="2000" dirty="0"/>
           </a:p>
           <a:p>
             <a:r>
-              <a:rPr lang="es-CO" b="1" dirty="0"/>
+              <a:rPr lang="es-CO" sz="2400" b="1" dirty="0"/>
               <a:t>Diapositivas</a:t>
             </a:r>
             <a:r>
-              <a:rPr lang="es-CO" dirty="0"/>
+              <a:rPr lang="es-CO" sz="2400" dirty="0"/>
               <a:t>: </a:t>
             </a:r>
             <a:r>
-              <a:rPr lang="es-CO" dirty="0">
+              <a:rPr lang="es-CO" sz="2400" dirty="0">
                 <a:hlinkClick r:id="rId4"/>
               </a:rPr>
               <a:t>https://discretas1-udea.github.io/discretas1-udea-20262/assets/slides/clase1.pdf</a:t>
             </a:r>
             <a:r>
-              <a:rPr lang="es-CO" dirty="0"/>
-              <a:t>  </a:t>
+              <a:rPr lang="es-CO" sz="2400" dirty="0"/>
+              <a:t> </a:t>
             </a:r>
           </a:p>
         </p:txBody>
@@ -12546,8 +12568,8 @@
           </a:p>
         </p:txBody>
       </p:sp>
-      <mc:AlternateContent xmlns:mc="http://schemas.openxmlformats.org/markup-compatibility/2006">
-        <mc:Choice xmlns:a14="http://schemas.microsoft.com/office/drawing/2010/main" Requires="a14">
+      <mc:AlternateContent xmlns:mc="http://schemas.openxmlformats.org/markup-compatibility/2006" xmlns:a14="http://schemas.microsoft.com/office/drawing/2010/main">
+        <mc:Choice Requires="a14">
           <p:graphicFrame>
             <p:nvGraphicFramePr>
               <p:cNvPr id="4" name="Tabla 4">
@@ -12841,7 +12863,7 @@
             </a:graphic>
           </p:graphicFrame>
         </mc:Choice>
-        <mc:Fallback>
+        <mc:Fallback xmlns="">
           <p:graphicFrame>
             <p:nvGraphicFramePr>
               <p:cNvPr id="4" name="Tabla 4">
@@ -13015,8 +13037,8 @@
           </p:graphicFrame>
         </mc:Fallback>
       </mc:AlternateContent>
-      <mc:AlternateContent xmlns:mc="http://schemas.openxmlformats.org/markup-compatibility/2006">
-        <mc:Choice xmlns:a14="http://schemas.microsoft.com/office/drawing/2010/main" Requires="a14">
+      <mc:AlternateContent xmlns:mc="http://schemas.openxmlformats.org/markup-compatibility/2006" xmlns:a14="http://schemas.microsoft.com/office/drawing/2010/main">
+        <mc:Choice Requires="a14">
           <p:graphicFrame>
             <p:nvGraphicFramePr>
               <p:cNvPr id="5" name="Tabla 4">
@@ -13752,7 +13774,7 @@
             </a:graphic>
           </p:graphicFrame>
         </mc:Choice>
-        <mc:Fallback>
+        <mc:Fallback xmlns="">
           <p:graphicFrame>
             <p:nvGraphicFramePr>
               <p:cNvPr id="5" name="Tabla 4">
@@ -14100,8 +14122,8 @@
           </p:graphicFrame>
         </mc:Fallback>
       </mc:AlternateContent>
-      <mc:AlternateContent xmlns:mc="http://schemas.openxmlformats.org/markup-compatibility/2006">
-        <mc:Choice xmlns:a14="http://schemas.microsoft.com/office/drawing/2010/main" Requires="a14">
+      <mc:AlternateContent xmlns:mc="http://schemas.openxmlformats.org/markup-compatibility/2006" xmlns:a14="http://schemas.microsoft.com/office/drawing/2010/main">
+        <mc:Choice Requires="a14">
           <p:graphicFrame>
             <p:nvGraphicFramePr>
               <p:cNvPr id="6" name="Tabla 4">
@@ -14837,7 +14859,7 @@
             </a:graphic>
           </p:graphicFrame>
         </mc:Choice>
-        <mc:Fallback>
+        <mc:Fallback xmlns="">
           <p:graphicFrame>
             <p:nvGraphicFramePr>
               <p:cNvPr id="6" name="Tabla 4">
@@ -19956,8 +19978,8 @@
           </a:p>
         </p:txBody>
       </p:sp>
-      <mc:AlternateContent xmlns:mc="http://schemas.openxmlformats.org/markup-compatibility/2006">
-        <mc:Choice xmlns:a14="http://schemas.microsoft.com/office/drawing/2010/main" Requires="a14">
+      <mc:AlternateContent xmlns:mc="http://schemas.openxmlformats.org/markup-compatibility/2006" xmlns:a14="http://schemas.microsoft.com/office/drawing/2010/main">
+        <mc:Choice Requires="a14">
           <p:graphicFrame>
             <p:nvGraphicFramePr>
               <p:cNvPr id="4" name="Tabla 4">
@@ -20251,7 +20273,7 @@
             </a:graphic>
           </p:graphicFrame>
         </mc:Choice>
-        <mc:Fallback>
+        <mc:Fallback xmlns="">
           <p:graphicFrame>
             <p:nvGraphicFramePr>
               <p:cNvPr id="4" name="Tabla 4">
@@ -20653,8 +20675,8 @@
           </a:p>
         </p:txBody>
       </p:sp>
-      <mc:AlternateContent xmlns:mc="http://schemas.openxmlformats.org/markup-compatibility/2006">
-        <mc:Choice xmlns:a14="http://schemas.microsoft.com/office/drawing/2010/main" Requires="a14">
+      <mc:AlternateContent xmlns:mc="http://schemas.openxmlformats.org/markup-compatibility/2006" xmlns:a14="http://schemas.microsoft.com/office/drawing/2010/main">
+        <mc:Choice Requires="a14">
           <p:graphicFrame>
             <p:nvGraphicFramePr>
               <p:cNvPr id="4" name="Tabla 4">
@@ -20942,7 +20964,7 @@
             </a:graphic>
           </p:graphicFrame>
         </mc:Choice>
-        <mc:Fallback>
+        <mc:Fallback xmlns="">
           <p:graphicFrame>
             <p:nvGraphicFramePr>
               <p:cNvPr id="4" name="Tabla 4">
